--- a/dist/초1/사회·역사/가족과생활/초1_사회·역사_가족과생활_02_나의하루_학생용.pptx
+++ b/dist/초1/사회·역사/가족과생활/초1_사회·역사_가족과생활_02_나의하루_학생용.pptx
@@ -118,38 +118,38 @@
   <p:extLst>
     <p:ext uri="{521415D9-36F7-43E2-AB2F-B90AF26B5E84}">
       <p14:sectionLst xmlns:p14="http://schemas.microsoft.com/office/powerpoint/2010/main">
-        <p14:section name="도입" id="{ccf1ffbc-bb49-f1cb-581f-e619308f2e2c}">
+        <p14:section name="도입" id="{f1d5a20c-ecb3-08f7-8c17-a25e3c59b605}">
           <p14:sldIdLst>
             <p14:sldId id="256"/>
             <p14:sldId id="257"/>
           </p14:sldIdLst>
         </p14:section>
-        <p14:section name="개념" id="{e89e0846-8c59-c181-94bb-cabf80c81a9c}">
+        <p14:section name="개념" id="{314be1df-ca22-a800-c18f-e251b0be7181}">
           <p14:sldIdLst>
             <p14:sldId id="258"/>
             <p14:sldId id="259"/>
             <p14:sldId id="260"/>
           </p14:sldIdLst>
         </p14:section>
-        <p14:section name="연습" id="{bbce0cf0-9eca-4bd8-9675-33738337dd15}">
+        <p14:section name="연습" id="{6d3224a2-f170-7c82-eaf3-4954a2db46ff}">
           <p14:sldIdLst>
             <p14:sldId id="261"/>
             <p14:sldId id="262"/>
             <p14:sldId id="263"/>
           </p14:sldIdLst>
         </p14:section>
-        <p14:section name="확인" id="{c79f003a-2589-4704-221f-a6701068f5b3}">
+        <p14:section name="확인" id="{a132c733-247c-5e27-dd17-527925d25fe5}">
           <p14:sldIdLst>
             <p14:sldId id="264"/>
             <p14:sldId id="265"/>
           </p14:sldIdLst>
         </p14:section>
-        <p14:section name="정리" id="{d9d730ab-c1da-26b3-6ba3-3ddeaaef03bd}">
+        <p14:section name="정리" id="{21259a6f-4ee9-d644-0144-7d2bd2ff6e04}">
           <p14:sldIdLst>
             <p14:sldId id="266"/>
           </p14:sldIdLst>
         </p14:section>
-        <p14:section name="보충" id="{f3a40f0c-5dfd-e9f8-3ad0-3bf0f4bf805b}">
+        <p14:section name="보충" id="{a843e161-75fe-b7c1-d79a-fcb762881fde}">
           <p14:sldIdLst>
             <p14:sldId id="267"/>
           </p14:sldIdLst>
